--- a/classes/parte-10-seguridad-en-la-nube-y-contenedores/225-seguridad-en-google-cloud-platform/clase-225-presentacion.pptx
+++ b/classes/parte-10-seguridad-en-la-nube-y-contenedores/225-seguridad-en-google-cloud-platform/clase-225-presentacion.pptx
@@ -17,6 +17,10 @@
     <p:sldId id="265" r:id="rId16"/>
     <p:sldId id="266" r:id="rId17"/>
     <p:sldId id="267" r:id="rId18"/>
+    <p:sldId id="268" r:id="rId19"/>
+    <p:sldId id="269" r:id="rId20"/>
+    <p:sldId id="270" r:id="rId21"/>
+    <p:sldId id="271" r:id="rId22"/>
   </p:sldIdLst>
   <p:sldSz cx="9144000" cy="6858000" type="screen4x3"/>
   <p:notesSz cx="6858000" cy="9144000"/>
@@ -3198,7 +3202,7 @@
                   <a:srgbClr val="0B3D2E"/>
                 </a:solidFill>
               </a:rPr>
-              <a:t>⚠️ Errores comunes</a:t>
+              <a:t>🧪 Laboratorio guiado</a:t>
             </a:r>
           </a:p>
         </p:txBody>
@@ -3236,67 +3240,97 @@
                   <a:srgbClr val="22282E"/>
                 </a:solidFill>
               </a:rPr>
-              <a:t>•  Permission denied pese a rol asignado — Rol asignado en el ámbito equivocado; recuerda la herencia jerárquica.</a:t>
-            </a:r>
-          </a:p>
-          <a:p>
-            <a:pPr>
-              <a:spcAft>
-                <a:spcPts val="600"/>
-              </a:spcAft>
-            </a:pPr>
-            <a:r>
-              <a:rPr sz="1500">
-                <a:solidFill>
-                  <a:srgbClr val="22282E"/>
-                </a:solidFill>
-              </a:rPr>
-              <a:t>•  Service account key filtrada en un repo — Se descargó una clave JSON; revócala y migra a Workload Identity.</a:t>
-            </a:r>
-          </a:p>
-          <a:p>
-            <a:pPr>
-              <a:spcAft>
-                <a:spcPts val="600"/>
-              </a:spcAft>
-            </a:pPr>
-            <a:r>
-              <a:rPr sz="1500">
-                <a:solidFill>
-                  <a:srgbClr val="22282E"/>
-                </a:solidFill>
-              </a:rPr>
-              <a:t>•  VM sigue creándose con IP pública — Organization Policy en modo audit o no propagada; verifica el constraint y el ámbito.</a:t>
-            </a:r>
-          </a:p>
-          <a:p>
-            <a:pPr>
-              <a:spcAft>
-                <a:spcPts val="600"/>
-              </a:spcAft>
-            </a:pPr>
-            <a:r>
-              <a:rPr sz="1500">
-                <a:solidFill>
-                  <a:srgbClr val="22282E"/>
-                </a:solidFill>
-              </a:rPr>
-              <a:t>•  Firewall "no bloquea" tráfico — La VPC permite saliente por defecto; añade reglas deny explícitas si hace falta.</a:t>
-            </a:r>
-          </a:p>
-          <a:p>
-            <a:pPr>
-              <a:spcAft>
-                <a:spcPts val="600"/>
-              </a:spcAft>
-            </a:pPr>
-            <a:r>
-              <a:rPr sz="1500">
-                <a:solidFill>
-                  <a:srgbClr val="22282E"/>
-                </a:solidFill>
-              </a:rPr>
-              <a:t>•  SCC sin hallazgos — Tier Standard limitado; para detección avanzada activa Premium/Enterprise.</a:t>
+              <a:t>•  Crea un proyecto de laboratorio dentro de una carpeta y aplica un rol Viewer a un usuario a nivel de carpeta; verifica la herencia hacia el proyecto.</a:t>
+            </a:r>
+          </a:p>
+          <a:p>
+            <a:pPr>
+              <a:spcAft>
+                <a:spcPts val="600"/>
+              </a:spcAft>
+            </a:pPr>
+            <a:r>
+              <a:rPr sz="1500">
+                <a:solidFill>
+                  <a:srgbClr val="22282E"/>
+                </a:solidFill>
+              </a:rPr>
+              <a:t>•  Crea una service account para una carga y asígnale solo el rol mínimo. No descargues una clave JSON; usa Workload Identity o impersonación.</a:t>
+            </a:r>
+          </a:p>
+          <a:p>
+            <a:pPr>
+              <a:spcAft>
+                <a:spcPts val="600"/>
+              </a:spcAft>
+            </a:pPr>
+            <a:r>
+              <a:rPr sz="1500">
+                <a:solidFill>
+                  <a:srgbClr val="22282E"/>
+                </a:solidFill>
+              </a:rPr>
+              <a:t>•  Aplica una Organization Policy que impida VMs con IP externa (constraints/compute.vmExternalIpAccess). Intenta crear una VM pública y confirma el bloqueo.</a:t>
+            </a:r>
+          </a:p>
+          <a:p>
+            <a:pPr>
+              <a:spcAft>
+                <a:spcPts val="600"/>
+              </a:spcAft>
+            </a:pPr>
+            <a:r>
+              <a:rPr sz="1500">
+                <a:solidFill>
+                  <a:srgbClr val="22282E"/>
+                </a:solidFill>
+              </a:rPr>
+              <a:t>•  Configura una VPC con una regla de firewall que permita solo SSH desde un rango concreto vía IAP; deja el resto denegado por defecto.</a:t>
+            </a:r>
+          </a:p>
+          <a:p>
+            <a:pPr>
+              <a:spcAft>
+                <a:spcPts val="600"/>
+              </a:spcAft>
+            </a:pPr>
+            <a:r>
+              <a:rPr sz="1500">
+                <a:solidFill>
+                  <a:srgbClr val="22282E"/>
+                </a:solidFill>
+              </a:rPr>
+              <a:t>•  Habilita Security Command Center (tier Standard) y revisa hallazgos de tipo Public Bucket o Open Firewall.</a:t>
+            </a:r>
+          </a:p>
+          <a:p>
+            <a:pPr>
+              <a:spcAft>
+                <a:spcPts val="600"/>
+              </a:spcAft>
+            </a:pPr>
+            <a:r>
+              <a:rPr sz="1500">
+                <a:solidFill>
+                  <a:srgbClr val="22282E"/>
+                </a:solidFill>
+              </a:rPr>
+              <a:t>•  Cifra un bucket con CMEK usando una clave de Cloud KMS y revisa la política de la clave.</a:t>
+            </a:r>
+          </a:p>
+          <a:p>
+            <a:pPr>
+              <a:spcAft>
+                <a:spcPts val="600"/>
+              </a:spcAft>
+            </a:pPr>
+            <a:r>
+              <a:rPr sz="1500">
+                <a:solidFill>
+                  <a:srgbClr val="22282E"/>
+                </a:solidFill>
+              </a:rPr>
+              <a:t>•  Ejecuta prowler gcp --compliance cis2.0gcp y corrige tres hallazgos de severidad alta; vuelve a ejecutar para verificar.</a:t>
             </a:r>
           </a:p>
         </p:txBody>
@@ -3347,7 +3381,7 @@
                   <a:srgbClr val="0B3D2E"/>
                 </a:solidFill>
               </a:rPr>
-              <a:t>❓ Preguntas frecuentes</a:t>
+              <a:t>✍️ Ejercicios</a:t>
             </a:r>
           </a:p>
         </p:txBody>
@@ -3385,82 +3419,82 @@
                   <a:srgbClr val="22282E"/>
                 </a:solidFill>
               </a:rPr>
-              <a:t>•  ❓ ¿Por qué evitar las claves JSON de service account?</a:t>
-            </a:r>
-          </a:p>
-          <a:p>
-            <a:pPr>
-              <a:spcAft>
-                <a:spcPts val="600"/>
-              </a:spcAft>
-            </a:pPr>
-            <a:r>
-              <a:rPr sz="1500">
-                <a:solidFill>
-                  <a:srgbClr val="22282E"/>
-                </a:solidFill>
-              </a:rPr>
-              <a:t>•  Son secretos de larga duración que suelen terminar en repositorios o discos. Workload Identity y la impersonación proveen credenciales temporales sin archivo que filtrar.</a:t>
-            </a:r>
-          </a:p>
-          <a:p>
-            <a:pPr>
-              <a:spcAft>
-                <a:spcPts val="600"/>
-              </a:spcAft>
-            </a:pPr>
-            <a:r>
-              <a:rPr sz="1500">
-                <a:solidFill>
-                  <a:srgbClr val="22282E"/>
-                </a:solidFill>
-              </a:rPr>
-              <a:t>•  ❓ ¿Organization Policy o IAM?</a:t>
-            </a:r>
-          </a:p>
-          <a:p>
-            <a:pPr>
-              <a:spcAft>
-                <a:spcPts val="600"/>
-              </a:spcAft>
-            </a:pPr>
-            <a:r>
-              <a:rPr sz="1500">
-                <a:solidFill>
-                  <a:srgbClr val="22282E"/>
-                </a:solidFill>
-              </a:rPr>
-              <a:t>•  Se complementan: IAM decide quién puede hacer qué; Organization Policy define qué está permitido en absoluto (guardarraíles), independientemente de los permisos IAM.</a:t>
-            </a:r>
-          </a:p>
-          <a:p>
-            <a:pPr>
-              <a:spcAft>
-                <a:spcPts val="600"/>
-              </a:spcAft>
-            </a:pPr>
-            <a:r>
-              <a:rPr sz="1500">
-                <a:solidFill>
-                  <a:srgbClr val="22282E"/>
-                </a:solidFill>
-              </a:rPr>
-              <a:t>•  ❓ ¿Qué protege VPC Service Controls que IAM no?</a:t>
-            </a:r>
-          </a:p>
-          <a:p>
-            <a:pPr>
-              <a:spcAft>
-                <a:spcPts val="600"/>
-              </a:spcAft>
-            </a:pPr>
-            <a:r>
-              <a:rPr sz="1500">
-                <a:solidFill>
-                  <a:srgbClr val="22282E"/>
-                </a:solidFill>
-              </a:rPr>
-              <a:t>•  IAM controla el acceso por identidad; VPC Service Controls crea un perímetro que impide que datos salgan a proyectos o redes fuera del perímetro aunque haya credenciales válidas, mitigando exfiltración.</a:t>
+              <a:t>•  Diseña una jerarquía de carpetas para separar producción, staging y sandbox.</a:t>
+            </a:r>
+          </a:p>
+          <a:p>
+            <a:pPr>
+              <a:spcAft>
+                <a:spcPts val="600"/>
+              </a:spcAft>
+            </a:pPr>
+            <a:r>
+              <a:rPr sz="1500">
+                <a:solidFill>
+                  <a:srgbClr val="22282E"/>
+                </a:solidFill>
+              </a:rPr>
+              <a:t>•  Crea un rol personalizado que permita leer objetos de un bucket pero no listarlos.</a:t>
+            </a:r>
+          </a:p>
+          <a:p>
+            <a:pPr>
+              <a:spcAft>
+                <a:spcPts val="600"/>
+              </a:spcAft>
+            </a:pPr>
+            <a:r>
+              <a:rPr sz="1500">
+                <a:solidFill>
+                  <a:srgbClr val="22282E"/>
+                </a:solidFill>
+              </a:rPr>
+              <a:t>•  Escribe una Organization Policy que restrinja las regiones donde se pueden crear recursos.</a:t>
+            </a:r>
+          </a:p>
+          <a:p>
+            <a:pPr>
+              <a:spcAft>
+                <a:spcPts val="600"/>
+              </a:spcAft>
+            </a:pPr>
+            <a:r>
+              <a:rPr sz="1500">
+                <a:solidFill>
+                  <a:srgbClr val="22282E"/>
+                </a:solidFill>
+              </a:rPr>
+              <a:t>•  Configura Private Google Access para que una VM sin IP pública acceda a APIs de Google.</a:t>
+            </a:r>
+          </a:p>
+          <a:p>
+            <a:pPr>
+              <a:spcAft>
+                <a:spcPts val="600"/>
+              </a:spcAft>
+            </a:pPr>
+            <a:r>
+              <a:rPr sz="1500">
+                <a:solidFill>
+                  <a:srgbClr val="22282E"/>
+                </a:solidFill>
+              </a:rPr>
+              <a:t>•  Interpreta un hallazgo de SCC de tipo PUBLICBUCKETACL.</a:t>
+            </a:r>
+          </a:p>
+          <a:p>
+            <a:pPr>
+              <a:spcAft>
+                <a:spcPts val="600"/>
+              </a:spcAft>
+            </a:pPr>
+            <a:r>
+              <a:rPr sz="1500">
+                <a:solidFill>
+                  <a:srgbClr val="22282E"/>
+                </a:solidFill>
+              </a:rPr>
+              <a:t>•  Diseña un perímetro de VPC Service Controls alrededor de Cloud Storage.</a:t>
             </a:r>
           </a:p>
         </p:txBody>
@@ -3511,7 +3545,7 @@
                   <a:srgbClr val="0B3D2E"/>
                 </a:solidFill>
               </a:rPr>
-              <a:t>🔗 Referencias</a:t>
+              <a:t>📝 Reto verificable</a:t>
             </a:r>
           </a:p>
         </p:txBody>
@@ -3549,71 +3583,623 @@
                   <a:srgbClr val="22282E"/>
                 </a:solidFill>
               </a:rPr>
-              <a:t>•  Google Cloud Security Foundations Guide. &lt;https://cloud.google.com/architecture/security-foundations&gt;</a:t>
-            </a:r>
-          </a:p>
-          <a:p>
-            <a:pPr>
-              <a:spcAft>
-                <a:spcPts val="600"/>
-              </a:spcAft>
-            </a:pPr>
-            <a:r>
-              <a:rPr sz="1500">
-                <a:solidFill>
-                  <a:srgbClr val="22282E"/>
-                </a:solidFill>
-              </a:rPr>
-              <a:t>•  Google Cloud IAM docs. &lt;https://cloud.google.com/iam/docs&gt;</a:t>
-            </a:r>
-          </a:p>
-          <a:p>
-            <a:pPr>
-              <a:spcAft>
-                <a:spcPts val="600"/>
-              </a:spcAft>
-            </a:pPr>
-            <a:r>
-              <a:rPr sz="1500">
-                <a:solidFill>
-                  <a:srgbClr val="22282E"/>
-                </a:solidFill>
-              </a:rPr>
-              <a:t>•  Security Command Center. &lt;https://cloud.google.com/security-command-center/docs&gt;</a:t>
-            </a:r>
-          </a:p>
-          <a:p>
-            <a:pPr>
-              <a:spcAft>
-                <a:spcPts val="600"/>
-              </a:spcAft>
-            </a:pPr>
-            <a:r>
-              <a:rPr sz="1500">
-                <a:solidFill>
-                  <a:srgbClr val="22282E"/>
-                </a:solidFill>
-              </a:rPr>
-              <a:t>•  Organization Policy Service. &lt;https://cloud.google.com/resource-manager/docs/organization-policy/overview&gt;</a:t>
-            </a:r>
-          </a:p>
-          <a:p>
-            <a:pPr>
-              <a:spcAft>
-                <a:spcPts val="600"/>
-              </a:spcAft>
-            </a:pPr>
-            <a:r>
-              <a:rPr sz="1500">
-                <a:solidFill>
-                  <a:srgbClr val="22282E"/>
-                </a:solidFill>
-              </a:rPr>
-              <a:t>•  CIS Google Cloud Platform Foundation Benchmark. &lt;https://www.cisecurity.org/benchmark/googlecloudcomputingplatform&gt;</a:t>
-            </a:r>
-          </a:p>
-        </p:txBody>
-      </p:sp>
+              <a:t>•  Endurece un proyecto de laboratorio: sin service account keys descargables, Organization Policy que</a:t>
+            </a:r>
+          </a:p>
+          <a:p>
+            <a:pPr>
+              <a:spcAft>
+                <a:spcPts val="600"/>
+              </a:spcAft>
+            </a:pPr>
+            <a:r>
+              <a:rPr sz="1500">
+                <a:solidFill>
+                  <a:srgbClr val="22282E"/>
+                </a:solidFill>
+              </a:rPr>
+              <a:t>•  prohíbe IPs externas, SCC habilitado, y al menos un bucket cifrado con CMEK.</a:t>
+            </a:r>
+          </a:p>
+          <a:p>
+            <a:pPr>
+              <a:spcAft>
+                <a:spcPts val="600"/>
+              </a:spcAft>
+            </a:pPr>
+            <a:r>
+              <a:rPr sz="1500">
+                <a:solidFill>
+                  <a:srgbClr val="22282E"/>
+                </a:solidFill>
+              </a:rPr>
+              <a:t>•  Criterio de aceptación: crear una VM con IP externa es bloqueado por la policy, no existen claves</a:t>
+            </a:r>
+          </a:p>
+          <a:p>
+            <a:pPr>
+              <a:spcAft>
+                <a:spcPts val="600"/>
+              </a:spcAft>
+            </a:pPr>
+            <a:r>
+              <a:rPr sz="1500">
+                <a:solidFill>
+                  <a:srgbClr val="22282E"/>
+                </a:solidFill>
+              </a:rPr>
+              <a:t>•  de service account activas, y prowler gcp reporta como PASS los controles de IAM y de exposición</a:t>
+            </a:r>
+          </a:p>
+          <a:p>
+            <a:pPr>
+              <a:spcAft>
+                <a:spcPts val="600"/>
+              </a:spcAft>
+            </a:pPr>
+            <a:r>
+              <a:rPr sz="1500">
+                <a:solidFill>
+                  <a:srgbClr val="22282E"/>
+                </a:solidFill>
+              </a:rPr>
+              <a:t>•  pública que fallaban al inicio.</a:t>
+            </a:r>
+          </a:p>
+        </p:txBody>
+      </p:sp>
+    </p:spTree>
+  </p:cSld>
+  <p:clrMapOvr>
+    <a:masterClrMapping/>
+  </p:clrMapOvr>
+</p:sld>
+</file>
+
+<file path=ppt/slides/slide13.xml><?xml version="1.0" encoding="utf-8"?>
+<p:sld xmlns:a="http://schemas.openxmlformats.org/drawingml/2006/main" xmlns:p="http://schemas.openxmlformats.org/presentationml/2006/main" xmlns:r="http://schemas.openxmlformats.org/officeDocument/2006/relationships">
+  <p:cSld>
+    <p:spTree>
+      <p:nvGrpSpPr>
+        <p:cNvPr id="1" name=""/>
+        <p:cNvGrpSpPr/>
+        <p:nvPr/>
+      </p:nvGrpSpPr>
+      <p:grpSpPr/>
+      <p:sp>
+        <p:nvSpPr>
+          <p:cNvPr id="2" name="TextBox 1"/>
+          <p:cNvSpPr txBox="1"/>
+          <p:nvPr/>
+        </p:nvSpPr>
+        <p:spPr>
+          <a:xfrm>
+            <a:off x="457200" y="320040"/>
+            <a:ext cx="8229600" cy="822960"/>
+          </a:xfrm>
+          <a:prstGeom prst="rect">
+            <a:avLst/>
+          </a:prstGeom>
+          <a:noFill/>
+        </p:spPr>
+        <p:txBody>
+          <a:bodyPr wrap="square">
+            <a:spAutoFit/>
+          </a:bodyPr>
+          <a:lstStyle/>
+          <a:p>
+            <a:r>
+              <a:rPr sz="2600" b="1">
+                <a:solidFill>
+                  <a:srgbClr val="0B3D2E"/>
+                </a:solidFill>
+              </a:rPr>
+              <a:t>⚠️ Errores comunes</a:t>
+            </a:r>
+          </a:p>
+        </p:txBody>
+      </p:sp>
+      <p:sp>
+        <p:nvSpPr>
+          <p:cNvPr id="3" name="TextBox 2"/>
+          <p:cNvSpPr txBox="1"/>
+          <p:nvPr/>
+        </p:nvSpPr>
+        <p:spPr>
+          <a:xfrm>
+            <a:off x="457200" y="1280160"/>
+            <a:ext cx="8229600" cy="4937760"/>
+          </a:xfrm>
+          <a:prstGeom prst="rect">
+            <a:avLst/>
+          </a:prstGeom>
+          <a:noFill/>
+        </p:spPr>
+        <p:txBody>
+          <a:bodyPr wrap="square">
+            <a:spAutoFit/>
+          </a:bodyPr>
+          <a:lstStyle/>
+          <a:p>
+            <a:pPr>
+              <a:spcAft>
+                <a:spcPts val="600"/>
+              </a:spcAft>
+            </a:pPr>
+            <a:r>
+              <a:rPr sz="1500">
+                <a:solidFill>
+                  <a:srgbClr val="22282E"/>
+                </a:solidFill>
+              </a:rPr>
+              <a:t>•  Permission denied pese a rol asignado — Rol asignado en el ámbito equivocado; recuerda la herencia jerárquica.</a:t>
+            </a:r>
+          </a:p>
+          <a:p>
+            <a:pPr>
+              <a:spcAft>
+                <a:spcPts val="600"/>
+              </a:spcAft>
+            </a:pPr>
+            <a:r>
+              <a:rPr sz="1500">
+                <a:solidFill>
+                  <a:srgbClr val="22282E"/>
+                </a:solidFill>
+              </a:rPr>
+              <a:t>•  Service account key filtrada en un repo — Se descargó una clave JSON; revócala y migra a Workload Identity.</a:t>
+            </a:r>
+          </a:p>
+          <a:p>
+            <a:pPr>
+              <a:spcAft>
+                <a:spcPts val="600"/>
+              </a:spcAft>
+            </a:pPr>
+            <a:r>
+              <a:rPr sz="1500">
+                <a:solidFill>
+                  <a:srgbClr val="22282E"/>
+                </a:solidFill>
+              </a:rPr>
+              <a:t>•  VM sigue creándose con IP pública — Organization Policy en modo audit o no propagada; verifica el constraint y el ámbito.</a:t>
+            </a:r>
+          </a:p>
+          <a:p>
+            <a:pPr>
+              <a:spcAft>
+                <a:spcPts val="600"/>
+              </a:spcAft>
+            </a:pPr>
+            <a:r>
+              <a:rPr sz="1500">
+                <a:solidFill>
+                  <a:srgbClr val="22282E"/>
+                </a:solidFill>
+              </a:rPr>
+              <a:t>•  Firewall "no bloquea" tráfico — La VPC permite saliente por defecto; añade reglas deny explícitas si hace falta.</a:t>
+            </a:r>
+          </a:p>
+          <a:p>
+            <a:pPr>
+              <a:spcAft>
+                <a:spcPts val="600"/>
+              </a:spcAft>
+            </a:pPr>
+            <a:r>
+              <a:rPr sz="1500">
+                <a:solidFill>
+                  <a:srgbClr val="22282E"/>
+                </a:solidFill>
+              </a:rPr>
+              <a:t>•  SCC sin hallazgos — Tier Standard limitado; para detección avanzada activa Premium/Enterprise.</a:t>
+            </a:r>
+          </a:p>
+        </p:txBody>
+      </p:sp>
+    </p:spTree>
+  </p:cSld>
+  <p:clrMapOvr>
+    <a:masterClrMapping/>
+  </p:clrMapOvr>
+</p:sld>
+</file>
+
+<file path=ppt/slides/slide14.xml><?xml version="1.0" encoding="utf-8"?>
+<p:sld xmlns:a="http://schemas.openxmlformats.org/drawingml/2006/main" xmlns:p="http://schemas.openxmlformats.org/presentationml/2006/main" xmlns:r="http://schemas.openxmlformats.org/officeDocument/2006/relationships">
+  <p:cSld>
+    <p:spTree>
+      <p:nvGrpSpPr>
+        <p:cNvPr id="1" name=""/>
+        <p:cNvGrpSpPr/>
+        <p:nvPr/>
+      </p:nvGrpSpPr>
+      <p:grpSpPr/>
+      <p:sp>
+        <p:nvSpPr>
+          <p:cNvPr id="2" name="TextBox 1"/>
+          <p:cNvSpPr txBox="1"/>
+          <p:nvPr/>
+        </p:nvSpPr>
+        <p:spPr>
+          <a:xfrm>
+            <a:off x="457200" y="320040"/>
+            <a:ext cx="8229600" cy="822960"/>
+          </a:xfrm>
+          <a:prstGeom prst="rect">
+            <a:avLst/>
+          </a:prstGeom>
+          <a:noFill/>
+        </p:spPr>
+        <p:txBody>
+          <a:bodyPr wrap="square">
+            <a:spAutoFit/>
+          </a:bodyPr>
+          <a:lstStyle/>
+          <a:p>
+            <a:r>
+              <a:rPr sz="2600" b="1">
+                <a:solidFill>
+                  <a:srgbClr val="0B3D2E"/>
+                </a:solidFill>
+              </a:rPr>
+              <a:t>❓ Preguntas frecuentes</a:t>
+            </a:r>
+          </a:p>
+        </p:txBody>
+      </p:sp>
+      <p:sp>
+        <p:nvSpPr>
+          <p:cNvPr id="3" name="TextBox 2"/>
+          <p:cNvSpPr txBox="1"/>
+          <p:nvPr/>
+        </p:nvSpPr>
+        <p:spPr>
+          <a:xfrm>
+            <a:off x="457200" y="1280160"/>
+            <a:ext cx="8229600" cy="4937760"/>
+          </a:xfrm>
+          <a:prstGeom prst="rect">
+            <a:avLst/>
+          </a:prstGeom>
+          <a:noFill/>
+        </p:spPr>
+        <p:txBody>
+          <a:bodyPr wrap="square">
+            <a:spAutoFit/>
+          </a:bodyPr>
+          <a:lstStyle/>
+          <a:p>
+            <a:pPr>
+              <a:spcAft>
+                <a:spcPts val="600"/>
+              </a:spcAft>
+            </a:pPr>
+            <a:r>
+              <a:rPr sz="1500">
+                <a:solidFill>
+                  <a:srgbClr val="22282E"/>
+                </a:solidFill>
+              </a:rPr>
+              <a:t>•  ❓ ¿Por qué evitar las claves JSON de service account?</a:t>
+            </a:r>
+          </a:p>
+          <a:p>
+            <a:pPr>
+              <a:spcAft>
+                <a:spcPts val="600"/>
+              </a:spcAft>
+            </a:pPr>
+            <a:r>
+              <a:rPr sz="1500">
+                <a:solidFill>
+                  <a:srgbClr val="22282E"/>
+                </a:solidFill>
+              </a:rPr>
+              <a:t>•  Son secretos de larga duración que suelen terminar en repositorios o discos. Workload Identity y la impersonación proveen credenciales temporales sin archivo que filtrar.</a:t>
+            </a:r>
+          </a:p>
+          <a:p>
+            <a:pPr>
+              <a:spcAft>
+                <a:spcPts val="600"/>
+              </a:spcAft>
+            </a:pPr>
+            <a:r>
+              <a:rPr sz="1500">
+                <a:solidFill>
+                  <a:srgbClr val="22282E"/>
+                </a:solidFill>
+              </a:rPr>
+              <a:t>•  ❓ ¿Organization Policy o IAM?</a:t>
+            </a:r>
+          </a:p>
+          <a:p>
+            <a:pPr>
+              <a:spcAft>
+                <a:spcPts val="600"/>
+              </a:spcAft>
+            </a:pPr>
+            <a:r>
+              <a:rPr sz="1500">
+                <a:solidFill>
+                  <a:srgbClr val="22282E"/>
+                </a:solidFill>
+              </a:rPr>
+              <a:t>•  Se complementan: IAM decide quién puede hacer qué; Organization Policy define qué está permitido en absoluto (guardarraíles), independientemente de los permisos IAM.</a:t>
+            </a:r>
+          </a:p>
+          <a:p>
+            <a:pPr>
+              <a:spcAft>
+                <a:spcPts val="600"/>
+              </a:spcAft>
+            </a:pPr>
+            <a:r>
+              <a:rPr sz="1500">
+                <a:solidFill>
+                  <a:srgbClr val="22282E"/>
+                </a:solidFill>
+              </a:rPr>
+              <a:t>•  ❓ ¿Qué protege VPC Service Controls que IAM no?</a:t>
+            </a:r>
+          </a:p>
+          <a:p>
+            <a:pPr>
+              <a:spcAft>
+                <a:spcPts val="600"/>
+              </a:spcAft>
+            </a:pPr>
+            <a:r>
+              <a:rPr sz="1500">
+                <a:solidFill>
+                  <a:srgbClr val="22282E"/>
+                </a:solidFill>
+              </a:rPr>
+              <a:t>•  IAM controla el acceso por identidad; VPC Service Controls crea un perímetro que impide que datos salgan a proyectos o redes fuera del perímetro aunque haya credenciales válidas, mitigando…</a:t>
+            </a:r>
+          </a:p>
+        </p:txBody>
+      </p:sp>
+    </p:spTree>
+  </p:cSld>
+  <p:clrMapOvr>
+    <a:masterClrMapping/>
+  </p:clrMapOvr>
+</p:sld>
+</file>
+
+<file path=ppt/slides/slide15.xml><?xml version="1.0" encoding="utf-8"?>
+<p:sld xmlns:a="http://schemas.openxmlformats.org/drawingml/2006/main" xmlns:p="http://schemas.openxmlformats.org/presentationml/2006/main" xmlns:r="http://schemas.openxmlformats.org/officeDocument/2006/relationships">
+  <p:cSld>
+    <p:spTree>
+      <p:nvGrpSpPr>
+        <p:cNvPr id="1" name=""/>
+        <p:cNvGrpSpPr/>
+        <p:nvPr/>
+      </p:nvGrpSpPr>
+      <p:grpSpPr/>
+      <p:sp>
+        <p:nvSpPr>
+          <p:cNvPr id="2" name="TextBox 1"/>
+          <p:cNvSpPr txBox="1"/>
+          <p:nvPr/>
+        </p:nvSpPr>
+        <p:spPr>
+          <a:xfrm>
+            <a:off x="457200" y="320040"/>
+            <a:ext cx="8229600" cy="822960"/>
+          </a:xfrm>
+          <a:prstGeom prst="rect">
+            <a:avLst/>
+          </a:prstGeom>
+          <a:noFill/>
+        </p:spPr>
+        <p:txBody>
+          <a:bodyPr wrap="square">
+            <a:spAutoFit/>
+          </a:bodyPr>
+          <a:lstStyle/>
+          <a:p>
+            <a:r>
+              <a:rPr sz="2600" b="1">
+                <a:solidFill>
+                  <a:srgbClr val="0B3D2E"/>
+                </a:solidFill>
+              </a:rPr>
+              <a:t>🔗 Referencias verificables y alcance</a:t>
+            </a:r>
+          </a:p>
+        </p:txBody>
+      </p:sp>
+      <p:sp>
+        <p:nvSpPr>
+          <p:cNvPr id="3" name="TextBox 2"/>
+          <p:cNvSpPr txBox="1"/>
+          <p:nvPr/>
+        </p:nvSpPr>
+        <p:spPr>
+          <a:xfrm>
+            <a:off x="457200" y="1280160"/>
+            <a:ext cx="8229600" cy="4937760"/>
+          </a:xfrm>
+          <a:prstGeom prst="rect">
+            <a:avLst/>
+          </a:prstGeom>
+          <a:noFill/>
+        </p:spPr>
+        <p:txBody>
+          <a:bodyPr wrap="square">
+            <a:spAutoFit/>
+          </a:bodyPr>
+          <a:lstStyle/>
+          <a:p>
+            <a:pPr>
+              <a:spcAft>
+                <a:spcPts val="600"/>
+              </a:spcAft>
+            </a:pPr>
+            <a:r>
+              <a:rPr sz="1500">
+                <a:solidFill>
+                  <a:srgbClr val="22282E"/>
+                </a:solidFill>
+              </a:rPr>
+              <a:t>•  Google Cloud Security Foundations. &lt;https://cloud.google.com/architecture/security-foundations&gt; — guía oficial de organización, red, identidad y logging fundacional.</a:t>
+            </a:r>
+          </a:p>
+          <a:p>
+            <a:pPr>
+              <a:spcAft>
+                <a:spcPts val="600"/>
+              </a:spcAft>
+            </a:pPr>
+            <a:r>
+              <a:rPr sz="1500">
+                <a:solidFill>
+                  <a:srgbClr val="22282E"/>
+                </a:solidFill>
+              </a:rPr>
+              <a:t>•  Google Cloud IAM. &lt;https://cloud.google.com/iam/docs&gt; — documentación oficial de principals, roles, políticas y cuentas de servicio.</a:t>
+            </a:r>
+          </a:p>
+          <a:p>
+            <a:pPr>
+              <a:spcAft>
+                <a:spcPts val="600"/>
+              </a:spcAft>
+            </a:pPr>
+            <a:r>
+              <a:rPr sz="1500">
+                <a:solidFill>
+                  <a:srgbClr val="22282E"/>
+                </a:solidFill>
+              </a:rPr>
+              <a:t>•  Organization Policy. &lt;https://cloud.google.com/resource-manager/docs/organization-policy/overview&gt; — restricciones y herencia; no concede permisos IAM.</a:t>
+            </a:r>
+          </a:p>
+          <a:p>
+            <a:pPr>
+              <a:spcAft>
+                <a:spcPts val="600"/>
+              </a:spcAft>
+            </a:pPr>
+            <a:r>
+              <a:rPr sz="1500">
+                <a:solidFill>
+                  <a:srgbClr val="22282E"/>
+                </a:solidFill>
+              </a:rPr>
+              <a:t>•  VPC Service Controls. &lt;https://cloud.google.com/vpc-service-controls/docs/overview&gt; — alcance, perímetros y limitaciones oficiales.</a:t>
+            </a:r>
+          </a:p>
+          <a:p>
+            <a:pPr>
+              <a:spcAft>
+                <a:spcPts val="600"/>
+              </a:spcAft>
+            </a:pPr>
+            <a:r>
+              <a:rPr sz="1500">
+                <a:solidFill>
+                  <a:srgbClr val="22282E"/>
+                </a:solidFill>
+              </a:rPr>
+              <a:t>•  Security Command Center. &lt;https://cloud.google.com/security-command-center/docs&gt; — postura y hallazgos según tier y servicios habilitados.</a:t>
+            </a:r>
+          </a:p>
+          <a:p>
+            <a:pPr>
+              <a:spcAft>
+                <a:spcPts val="600"/>
+              </a:spcAft>
+            </a:pPr>
+            <a:r>
+              <a:rPr sz="1500">
+                <a:solidFill>
+                  <a:srgbClr val="22282E"/>
+                </a:solidFill>
+              </a:rPr>
+              <a:t>•  CIS Google Cloud Platform Foundation Benchmark. &lt;https://www.cisecurity.org/benchmark/googlecloudcomputingplatform&gt; — baseline independiente; fijar versión y perfil.</a:t>
+            </a:r>
+          </a:p>
+        </p:txBody>
+      </p:sp>
+    </p:spTree>
+  </p:cSld>
+  <p:clrMapOvr>
+    <a:masterClrMapping/>
+  </p:clrMapOvr>
+</p:sld>
+</file>
+
+<file path=ppt/slides/slide16.xml><?xml version="1.0" encoding="utf-8"?>
+<p:sld xmlns:a="http://schemas.openxmlformats.org/drawingml/2006/main" xmlns:p="http://schemas.openxmlformats.org/presentationml/2006/main" xmlns:r="http://schemas.openxmlformats.org/officeDocument/2006/relationships">
+  <p:cSld>
+    <p:spTree>
+      <p:nvGrpSpPr>
+        <p:cNvPr id="1" name=""/>
+        <p:cNvGrpSpPr/>
+        <p:nvPr/>
+      </p:nvGrpSpPr>
+      <p:grpSpPr/>
+      <p:sp>
+        <p:nvSpPr>
+          <p:cNvPr id="2" name="TextBox 1"/>
+          <p:cNvSpPr txBox="1"/>
+          <p:nvPr/>
+        </p:nvSpPr>
+        <p:spPr>
+          <a:xfrm>
+            <a:off x="457200" y="274320"/>
+            <a:ext cx="8229600" cy="640080"/>
+          </a:xfrm>
+          <a:prstGeom prst="rect">
+            <a:avLst/>
+          </a:prstGeom>
+          <a:noFill/>
+        </p:spPr>
+        <p:txBody>
+          <a:bodyPr wrap="square">
+            <a:spAutoFit/>
+          </a:bodyPr>
+          <a:lstStyle/>
+          <a:p>
+            <a:r>
+              <a:rPr sz="2200" b="1">
+                <a:solidFill>
+                  <a:srgbClr val="0B3D2E"/>
+                </a:solidFill>
+              </a:rPr>
+              <a:t>Diagrama de la clase</a:t>
+            </a:r>
+          </a:p>
+        </p:txBody>
+      </p:sp>
+      <p:pic>
+        <p:nvPicPr>
+          <p:cNvPr id="3" name="Picture 2" descr="f5be400129bb5de1.png"/>
+          <p:cNvPicPr>
+            <a:picLocks noChangeAspect="1"/>
+          </p:cNvPicPr>
+          <p:nvPr/>
+        </p:nvPicPr>
+        <p:blipFill>
+          <a:blip r:embed="rId2"/>
+          <a:stretch>
+            <a:fillRect/>
+          </a:stretch>
+        </p:blipFill>
+        <p:spPr>
+          <a:xfrm>
+            <a:off x="1103914" y="1097280"/>
+            <a:ext cx="6936172" cy="5303520"/>
+          </a:xfrm>
+          <a:prstGeom prst="rect">
+            <a:avLst/>
+          </a:prstGeom>
+        </p:spPr>
+      </p:pic>
     </p:spTree>
   </p:cSld>
   <p:clrMapOvr>
@@ -4137,7 +4723,7 @@
                   <a:srgbClr val="0B3D2E"/>
                 </a:solidFill>
               </a:rPr>
-              <a:t>📖 Definiciones y características</a:t>
+              <a:t>🧠 Explicación en profundidad</a:t>
             </a:r>
           </a:p>
         </p:txBody>
@@ -4175,97 +4761,82 @@
                   <a:srgbClr val="22282E"/>
                 </a:solidFill>
               </a:rPr>
-              <a:t>•  Jerarquía de recursos: organización → carpetas → proyectos → recursos. Clave: las políticas IAM se heredan hacia abajo.</a:t>
-            </a:r>
-          </a:p>
-          <a:p>
-            <a:pPr>
-              <a:spcAft>
-                <a:spcPts val="600"/>
-              </a:spcAft>
-            </a:pPr>
-            <a:r>
-              <a:rPr sz="1500">
-                <a:solidFill>
-                  <a:srgbClr val="22282E"/>
-                </a:solidFill>
-              </a:rPr>
-              <a:t>•  Service account: identidad para cargas y automatización. Clave: evita claves descargables; usa Workload Identity.</a:t>
-            </a:r>
-          </a:p>
-          <a:p>
-            <a:pPr>
-              <a:spcAft>
-                <a:spcPts val="600"/>
-              </a:spcAft>
-            </a:pPr>
-            <a:r>
-              <a:rPr sz="1500">
-                <a:solidFill>
-                  <a:srgbClr val="22282E"/>
-                </a:solidFill>
-              </a:rPr>
-              <a:t>•  Rol predefinido: conjunto curado de permisos (viewer, editor, custom). Clave: evita el rol Owner salvo necesidad.</a:t>
-            </a:r>
-          </a:p>
-          <a:p>
-            <a:pPr>
-              <a:spcAft>
-                <a:spcPts val="600"/>
-              </a:spcAft>
-            </a:pPr>
-            <a:r>
-              <a:rPr sz="1500">
-                <a:solidFill>
-                  <a:srgbClr val="22282E"/>
-                </a:solidFill>
-              </a:rPr>
-              <a:t>•  Organization Policy: restricción declarativa a nivel de organización/carpeta. Clave: bloquea, por ejemplo, IPs públicas en VMs.</a:t>
-            </a:r>
-          </a:p>
-          <a:p>
-            <a:pPr>
-              <a:spcAft>
-                <a:spcPts val="600"/>
-              </a:spcAft>
-            </a:pPr>
-            <a:r>
-              <a:rPr sz="1500">
-                <a:solidFill>
-                  <a:srgbClr val="22282E"/>
-                </a:solidFill>
-              </a:rPr>
-              <a:t>•  Firewall de VPC: reglas allow/deny por prioridad y etiquetas. Clave: implícitamente deniega entrante y permite saliente.</a:t>
-            </a:r>
-          </a:p>
-          <a:p>
-            <a:pPr>
-              <a:spcAft>
-                <a:spcPts val="600"/>
-              </a:spcAft>
-            </a:pPr>
-            <a:r>
-              <a:rPr sz="1500">
-                <a:solidFill>
-                  <a:srgbClr val="22282E"/>
-                </a:solidFill>
-              </a:rPr>
-              <a:t>•  Security Command Center (SCC): panel central de postura y amenazas. Clave: detecta misconfiguraciones y actividad sospechosa.</a:t>
-            </a:r>
-          </a:p>
-          <a:p>
-            <a:pPr>
-              <a:spcAft>
-                <a:spcPts val="600"/>
-              </a:spcAft>
-            </a:pPr>
-            <a:r>
-              <a:rPr sz="1500">
-                <a:solidFill>
-                  <a:srgbClr val="22282E"/>
-                </a:solidFill>
-              </a:rPr>
-              <a:t>•  VPC Service Controls: perímetro de servicio que impide exfiltración. Clave: protege APIs gestionadas como Cloud Storage.</a:t>
+              <a:t>•  Google Cloud organiza recursos en organización, carpetas y proyectos. El proyecto es unidad de APIs, cuotas, billing y aislamiento administrativo, pero hereda políticas desde niveles superiores.…</a:t>
+            </a:r>
+          </a:p>
+          <a:p>
+            <a:pPr>
+              <a:spcAft>
+                <a:spcPts val="600"/>
+              </a:spcAft>
+            </a:pPr>
+            <a:r>
+              <a:rPr sz="1500">
+                <a:solidFill>
+                  <a:srgbClr val="22282E"/>
+                </a:solidFill>
+              </a:rPr>
+              <a:t>•  La jerarquía transmite IAM y restricciones, pero resuelve problemas diferentes. IAM indica quién puede ejecutar qué acción sobre un recurso. Organization Policy limita configuraciones permitidas. VPC…</a:t>
+            </a:r>
+          </a:p>
+          <a:p>
+            <a:pPr>
+              <a:spcAft>
+                <a:spcPts val="600"/>
+              </a:spcAft>
+            </a:pPr>
+            <a:r>
+              <a:rPr sz="1500">
+                <a:solidFill>
+                  <a:srgbClr val="22282E"/>
+                </a:solidFill>
+              </a:rPr>
+              <a:t>•  Las cuentas de servicio representan workloads. Las claves JSON descargables convierten la identidad en un secreto reutilizable; se prefieren identidades adjuntas y federación de cargas cuando la…</a:t>
+            </a:r>
+          </a:p>
+          <a:p>
+            <a:pPr>
+              <a:spcAft>
+                <a:spcPts val="600"/>
+              </a:spcAft>
+            </a:pPr>
+            <a:r>
+              <a:rPr sz="1500">
+                <a:solidFill>
+                  <a:srgbClr val="22282E"/>
+                </a:solidFill>
+              </a:rPr>
+              <a:t>•  Los roles básicos como Owner, Editor y Viewer son amplios. Roles predefinidos o personalizados reducen alcance, pero un rol personalizado exige mantenimiento cuando las APIs cambian. Policy…</a:t>
+            </a:r>
+          </a:p>
+          <a:p>
+            <a:pPr>
+              <a:spcAft>
+                <a:spcPts val="600"/>
+              </a:spcAft>
+            </a:pPr>
+            <a:r>
+              <a:rPr sz="1500">
+                <a:solidFill>
+                  <a:srgbClr val="22282E"/>
+                </a:solidFill>
+              </a:rPr>
+              <a:t>•  Las reglas firewall VPC tienen dirección, prioridad, acción, objetivo y fuente/destino; las reglas implícitas son parte del resultado. Shared VPC separa administración de red y proyectos de servicio.…</a:t>
+            </a:r>
+          </a:p>
+          <a:p>
+            <a:pPr>
+              <a:spcAft>
+                <a:spcPts val="600"/>
+              </a:spcAft>
+            </a:pPr>
+            <a:r>
+              <a:rPr sz="1500">
+                <a:solidFill>
+                  <a:srgbClr val="22282E"/>
+                </a:solidFill>
+              </a:rPr>
+              <a:t>•  VPC Service Controls evalúa accesos a servicios protegidos, identidades y contexto. Una regla de ingreso/egreso o nivel de acceso mal diseñado puede abrir el perímetro o bloquear operación legítima.…</a:t>
             </a:r>
           </a:p>
         </p:txBody>
@@ -4316,7 +4887,7 @@
                   <a:srgbClr val="0B3D2E"/>
                 </a:solidFill>
               </a:rPr>
-              <a:t>🧰 Herramientas y preparación</a:t>
+              <a:t>📖 Definiciones y características</a:t>
             </a:r>
           </a:p>
         </p:txBody>
@@ -4354,82 +4925,97 @@
                   <a:srgbClr val="22282E"/>
                 </a:solidFill>
               </a:rPr>
-              <a:t>•  CLI gcloud autenticada en un proyecto de laboratorio.</a:t>
-            </a:r>
-          </a:p>
-          <a:p>
-            <a:pPr>
-              <a:spcAft>
-                <a:spcPts val="600"/>
-              </a:spcAft>
-            </a:pPr>
-            <a:r>
-              <a:rPr sz="1500">
-                <a:solidFill>
-                  <a:srgbClr val="22282E"/>
-                </a:solidFill>
-              </a:rPr>
-              <a:t>•  ScoutSuite con proveedor gcp y Prowler (prowler gcp).</a:t>
-            </a:r>
-          </a:p>
-          <a:p>
-            <a:pPr>
-              <a:spcAft>
-                <a:spcPts val="600"/>
-              </a:spcAft>
-            </a:pPr>
-            <a:r>
-              <a:rPr sz="1500">
-                <a:solidFill>
-                  <a:srgbClr val="22282E"/>
-                </a:solidFill>
-              </a:rPr>
-              <a:t>•  Habilita las APIs necesarias antes de empezar (gcloud services enable).</a:t>
-            </a:r>
-          </a:p>
-          <a:p>
-            <a:pPr>
-              <a:spcAft>
-                <a:spcPts val="600"/>
-              </a:spcAft>
-            </a:pPr>
-            <a:r>
-              <a:rPr sz="1500">
-                <a:solidFill>
-                  <a:srgbClr val="22282E"/>
-                </a:solidFill>
-              </a:rPr>
-              <a:t>•  gcloud projects get-iam-policy my-lab-project</a:t>
-            </a:r>
-          </a:p>
-          <a:p>
-            <a:pPr>
-              <a:spcAft>
-                <a:spcPts val="600"/>
-              </a:spcAft>
-            </a:pPr>
-            <a:r>
-              <a:rPr sz="1500">
-                <a:solidFill>
-                  <a:srgbClr val="22282E"/>
-                </a:solidFill>
-              </a:rPr>
-              <a:t>•  gcloud iam service-accounts list</a:t>
-            </a:r>
-          </a:p>
-          <a:p>
-            <a:pPr>
-              <a:spcAft>
-                <a:spcPts val="600"/>
-              </a:spcAft>
-            </a:pPr>
-            <a:r>
-              <a:rPr sz="1500">
-                <a:solidFill>
-                  <a:srgbClr val="22282E"/>
-                </a:solidFill>
-              </a:rPr>
-              <a:t>•  gcloud iam service-accounts keys list --iam-account SAEMAIL</a:t>
+              <a:t>•  Jerarquía de recursos: organización → carpetas → proyectos → recursos. Clave: las políticas IAM se heredan hacia abajo.</a:t>
+            </a:r>
+          </a:p>
+          <a:p>
+            <a:pPr>
+              <a:spcAft>
+                <a:spcPts val="600"/>
+              </a:spcAft>
+            </a:pPr>
+            <a:r>
+              <a:rPr sz="1500">
+                <a:solidFill>
+                  <a:srgbClr val="22282E"/>
+                </a:solidFill>
+              </a:rPr>
+              <a:t>•  Service account: identidad para cargas y automatización. Clave: evita claves descargables; usa Workload Identity.</a:t>
+            </a:r>
+          </a:p>
+          <a:p>
+            <a:pPr>
+              <a:spcAft>
+                <a:spcPts val="600"/>
+              </a:spcAft>
+            </a:pPr>
+            <a:r>
+              <a:rPr sz="1500">
+                <a:solidFill>
+                  <a:srgbClr val="22282E"/>
+                </a:solidFill>
+              </a:rPr>
+              <a:t>•  Rol predefinido: conjunto de permisos mantenido por Google para una función. Clave: se distingue de roles básicos y personalizados y se asigna en el ámbito mínimo.</a:t>
+            </a:r>
+          </a:p>
+          <a:p>
+            <a:pPr>
+              <a:spcAft>
+                <a:spcPts val="600"/>
+              </a:spcAft>
+            </a:pPr>
+            <a:r>
+              <a:rPr sz="1500">
+                <a:solidFill>
+                  <a:srgbClr val="22282E"/>
+                </a:solidFill>
+              </a:rPr>
+              <a:t>•  Organization Policy: restricción declarativa a nivel de organización/carpeta. Clave: bloquea, por ejemplo, IPs públicas en VMs.</a:t>
+            </a:r>
+          </a:p>
+          <a:p>
+            <a:pPr>
+              <a:spcAft>
+                <a:spcPts val="600"/>
+              </a:spcAft>
+            </a:pPr>
+            <a:r>
+              <a:rPr sz="1500">
+                <a:solidFill>
+                  <a:srgbClr val="22282E"/>
+                </a:solidFill>
+              </a:rPr>
+              <a:t>•  Firewall de VPC: reglas allow/deny por prioridad y etiquetas. Clave: implícitamente deniega entrante y permite saliente.</a:t>
+            </a:r>
+          </a:p>
+          <a:p>
+            <a:pPr>
+              <a:spcAft>
+                <a:spcPts val="600"/>
+              </a:spcAft>
+            </a:pPr>
+            <a:r>
+              <a:rPr sz="1500">
+                <a:solidFill>
+                  <a:srgbClr val="22282E"/>
+                </a:solidFill>
+              </a:rPr>
+              <a:t>•  Security Command Center (SCC): panel central de postura y amenazas. Clave: detecta misconfiguraciones y actividad sospechosa.</a:t>
+            </a:r>
+          </a:p>
+          <a:p>
+            <a:pPr>
+              <a:spcAft>
+                <a:spcPts val="600"/>
+              </a:spcAft>
+            </a:pPr>
+            <a:r>
+              <a:rPr sz="1500">
+                <a:solidFill>
+                  <a:srgbClr val="22282E"/>
+                </a:solidFill>
+              </a:rPr>
+              <a:t>•  VPC Service Controls: control contextual para servicios compatibles dentro de perímetros. Clave: reduce ciertas rutas de exfiltración, pero requiere IAM, reglas de ingreso/egreso y pruebas.</a:t>
             </a:r>
           </a:p>
         </p:txBody>
@@ -4480,7 +5066,7 @@
                   <a:srgbClr val="0B3D2E"/>
                 </a:solidFill>
               </a:rPr>
-              <a:t>🧪 Laboratorio guiado</a:t>
+              <a:t>🔍 Caso razonado — service account sin clave y perímetro incompleto</a:t>
             </a:r>
           </a:p>
         </p:txBody>
@@ -4518,97 +5104,22 @@
                   <a:srgbClr val="22282E"/>
                 </a:solidFill>
               </a:rPr>
-              <a:t>•  Crea un proyecto de laboratorio dentro de una carpeta y aplica un rol Viewer a un usuario a nivel de carpeta; verifica la herencia hacia el proyecto.</a:t>
-            </a:r>
-          </a:p>
-          <a:p>
-            <a:pPr>
-              <a:spcAft>
-                <a:spcPts val="600"/>
-              </a:spcAft>
-            </a:pPr>
-            <a:r>
-              <a:rPr sz="1500">
-                <a:solidFill>
-                  <a:srgbClr val="22282E"/>
-                </a:solidFill>
-              </a:rPr>
-              <a:t>•  Crea una service account para una carga y asígnale solo el rol mínimo. No descargues una clave JSON; usa Workload Identity o impersonación.</a:t>
-            </a:r>
-          </a:p>
-          <a:p>
-            <a:pPr>
-              <a:spcAft>
-                <a:spcPts val="600"/>
-              </a:spcAft>
-            </a:pPr>
-            <a:r>
-              <a:rPr sz="1500">
-                <a:solidFill>
-                  <a:srgbClr val="22282E"/>
-                </a:solidFill>
-              </a:rPr>
-              <a:t>•  Aplica una Organization Policy que impida VMs con IP externa (constraints/compute.vmExternalIpAccess). Intenta crear una VM pública y confirma el bloqueo.</a:t>
-            </a:r>
-          </a:p>
-          <a:p>
-            <a:pPr>
-              <a:spcAft>
-                <a:spcPts val="600"/>
-              </a:spcAft>
-            </a:pPr>
-            <a:r>
-              <a:rPr sz="1500">
-                <a:solidFill>
-                  <a:srgbClr val="22282E"/>
-                </a:solidFill>
-              </a:rPr>
-              <a:t>•  Configura una VPC con una regla de firewall que permita solo SSH desde un rango concreto vía IAP; deja el resto denegado por defecto.</a:t>
-            </a:r>
-          </a:p>
-          <a:p>
-            <a:pPr>
-              <a:spcAft>
-                <a:spcPts val="600"/>
-              </a:spcAft>
-            </a:pPr>
-            <a:r>
-              <a:rPr sz="1500">
-                <a:solidFill>
-                  <a:srgbClr val="22282E"/>
-                </a:solidFill>
-              </a:rPr>
-              <a:t>•  Habilita Security Command Center (tier Standard) y revisa hallazgos de tipo Public Bucket o Open Firewall.</a:t>
-            </a:r>
-          </a:p>
-          <a:p>
-            <a:pPr>
-              <a:spcAft>
-                <a:spcPts val="600"/>
-              </a:spcAft>
-            </a:pPr>
-            <a:r>
-              <a:rPr sz="1500">
-                <a:solidFill>
-                  <a:srgbClr val="22282E"/>
-                </a:solidFill>
-              </a:rPr>
-              <a:t>•  Cifra un bucket con CMEK usando una clave de Cloud KMS y revisa la política de la clave.</a:t>
-            </a:r>
-          </a:p>
-          <a:p>
-            <a:pPr>
-              <a:spcAft>
-                <a:spcPts val="600"/>
-              </a:spcAft>
-            </a:pPr>
-            <a:r>
-              <a:rPr sz="1500">
-                <a:solidFill>
-                  <a:srgbClr val="22282E"/>
-                </a:solidFill>
-              </a:rPr>
-              <a:t>•  Ejecuta prowler gcp --compliance cis2.0gcp y corrige tres hallazgos de severidad alta; vuelve a ejecutar para verificar.</a:t>
+              <a:t>•  Una carga en GKE necesita leer BigQuery. En vez de descargar una clave, usa Workload Identity Federation for GKE y un binding mínimo. El proyecto está dentro de un perímetro VPC Service Controls…</a:t>
+            </a:r>
+          </a:p>
+          <a:p>
+            <a:pPr>
+              <a:spcAft>
+                <a:spcPts val="600"/>
+              </a:spcAft>
+            </a:pPr>
+            <a:r>
+              <a:rPr sz="1500">
+                <a:solidFill>
+                  <a:srgbClr val="22282E"/>
+                </a:solidFill>
+              </a:rPr>
+              <a:t>•  Cloud Audit Logs registra el principal técnico y la operación; para atribuir al despliegue se relacionan Kubernetes ServiceAccount, workload y binding. El caso muestra cómo identidad, perímetro y…</a:t>
             </a:r>
           </a:p>
         </p:txBody>
@@ -4659,7 +5170,7 @@
                   <a:srgbClr val="0B3D2E"/>
                 </a:solidFill>
               </a:rPr>
-              <a:t>✍️ Ejercicios</a:t>
+              <a:t>✅ Criterio de dominio</a:t>
             </a:r>
           </a:p>
         </p:txBody>
@@ -4697,82 +5208,7 @@
                   <a:srgbClr val="22282E"/>
                 </a:solidFill>
               </a:rPr>
-              <a:t>•  Diseña una jerarquía de carpetas para separar producción, staging y sandbox.</a:t>
-            </a:r>
-          </a:p>
-          <a:p>
-            <a:pPr>
-              <a:spcAft>
-                <a:spcPts val="600"/>
-              </a:spcAft>
-            </a:pPr>
-            <a:r>
-              <a:rPr sz="1500">
-                <a:solidFill>
-                  <a:srgbClr val="22282E"/>
-                </a:solidFill>
-              </a:rPr>
-              <a:t>•  Crea un rol personalizado que permita leer objetos de un bucket pero no listarlos.</a:t>
-            </a:r>
-          </a:p>
-          <a:p>
-            <a:pPr>
-              <a:spcAft>
-                <a:spcPts val="600"/>
-              </a:spcAft>
-            </a:pPr>
-            <a:r>
-              <a:rPr sz="1500">
-                <a:solidFill>
-                  <a:srgbClr val="22282E"/>
-                </a:solidFill>
-              </a:rPr>
-              <a:t>•  Escribe una Organization Policy que restrinja las regiones donde se pueden crear recursos.</a:t>
-            </a:r>
-          </a:p>
-          <a:p>
-            <a:pPr>
-              <a:spcAft>
-                <a:spcPts val="600"/>
-              </a:spcAft>
-            </a:pPr>
-            <a:r>
-              <a:rPr sz="1500">
-                <a:solidFill>
-                  <a:srgbClr val="22282E"/>
-                </a:solidFill>
-              </a:rPr>
-              <a:t>•  Configura Private Google Access para que una VM sin IP pública acceda a APIs de Google.</a:t>
-            </a:r>
-          </a:p>
-          <a:p>
-            <a:pPr>
-              <a:spcAft>
-                <a:spcPts val="600"/>
-              </a:spcAft>
-            </a:pPr>
-            <a:r>
-              <a:rPr sz="1500">
-                <a:solidFill>
-                  <a:srgbClr val="22282E"/>
-                </a:solidFill>
-              </a:rPr>
-              <a:t>•  Interpreta un hallazgo de SCC de tipo PUBLICBUCKETACL.</a:t>
-            </a:r>
-          </a:p>
-          <a:p>
-            <a:pPr>
-              <a:spcAft>
-                <a:spcPts val="600"/>
-              </a:spcAft>
-            </a:pPr>
-            <a:r>
-              <a:rPr sz="1500">
-                <a:solidFill>
-                  <a:srgbClr val="22282E"/>
-                </a:solidFill>
-              </a:rPr>
-              <a:t>•  Diseña un perímetro de VPC Service Controls alrededor de Cloud Storage.</a:t>
+              <a:t>•  Dominas la clase cuando puedes predecir herencia en organización/carpetas/proyectos, separar IAM de Organization Policy, evitar claves de service account mediante identidad de carga y diseñar una…</a:t>
             </a:r>
           </a:p>
         </p:txBody>
@@ -4823,7 +5259,7 @@
                   <a:srgbClr val="0B3D2E"/>
                 </a:solidFill>
               </a:rPr>
-              <a:t>📝 Reto verificable</a:t>
+              <a:t>🧰 Herramientas y preparación</a:t>
             </a:r>
           </a:p>
         </p:txBody>
@@ -4861,67 +5297,37 @@
                   <a:srgbClr val="22282E"/>
                 </a:solidFill>
               </a:rPr>
-              <a:t>•  Endurece un proyecto de laboratorio: sin service account keys descargables, Organization Policy que</a:t>
-            </a:r>
-          </a:p>
-          <a:p>
-            <a:pPr>
-              <a:spcAft>
-                <a:spcPts val="600"/>
-              </a:spcAft>
-            </a:pPr>
-            <a:r>
-              <a:rPr sz="1500">
-                <a:solidFill>
-                  <a:srgbClr val="22282E"/>
-                </a:solidFill>
-              </a:rPr>
-              <a:t>•  prohíbe IPs externas, SCC habilitado, y al menos un bucket cifrado con CMEK.</a:t>
-            </a:r>
-          </a:p>
-          <a:p>
-            <a:pPr>
-              <a:spcAft>
-                <a:spcPts val="600"/>
-              </a:spcAft>
-            </a:pPr>
-            <a:r>
-              <a:rPr sz="1500">
-                <a:solidFill>
-                  <a:srgbClr val="22282E"/>
-                </a:solidFill>
-              </a:rPr>
-              <a:t>•  Criterio de aceptación: crear una VM con IP externa es bloqueado por la policy, no existen claves</a:t>
-            </a:r>
-          </a:p>
-          <a:p>
-            <a:pPr>
-              <a:spcAft>
-                <a:spcPts val="600"/>
-              </a:spcAft>
-            </a:pPr>
-            <a:r>
-              <a:rPr sz="1500">
-                <a:solidFill>
-                  <a:srgbClr val="22282E"/>
-                </a:solidFill>
-              </a:rPr>
-              <a:t>•  de service account activas, y prowler gcp reporta como PASS los controles de IAM y de exposición</a:t>
-            </a:r>
-          </a:p>
-          <a:p>
-            <a:pPr>
-              <a:spcAft>
-                <a:spcPts val="600"/>
-              </a:spcAft>
-            </a:pPr>
-            <a:r>
-              <a:rPr sz="1500">
-                <a:solidFill>
-                  <a:srgbClr val="22282E"/>
-                </a:solidFill>
-              </a:rPr>
-              <a:t>•  pública que fallaban al inicio.</a:t>
+              <a:t>•  CLI gcloud autenticada en un proyecto de laboratorio.</a:t>
+            </a:r>
+          </a:p>
+          <a:p>
+            <a:pPr>
+              <a:spcAft>
+                <a:spcPts val="600"/>
+              </a:spcAft>
+            </a:pPr>
+            <a:r>
+              <a:rPr sz="1500">
+                <a:solidFill>
+                  <a:srgbClr val="22282E"/>
+                </a:solidFill>
+              </a:rPr>
+              <a:t>•  ScoutSuite con proveedor gcp y Prowler (prowler gcp).</a:t>
+            </a:r>
+          </a:p>
+          <a:p>
+            <a:pPr>
+              <a:spcAft>
+                <a:spcPts val="600"/>
+              </a:spcAft>
+            </a:pPr>
+            <a:r>
+              <a:rPr sz="1500">
+                <a:solidFill>
+                  <a:srgbClr val="22282E"/>
+                </a:solidFill>
+              </a:rPr>
+              <a:t>•  Habilita las APIs necesarias antes de empezar (gcloud services enable).</a:t>
             </a:r>
           </a:p>
         </p:txBody>
